--- a/projects/repfr/cems.pptx
+++ b/projects/repfr/cems.pptx
@@ -197,7 +197,7 @@
           <a:p>
             <a:fld id="{0E5916DC-4114-8046-8117-7128A4471AEC}" type="datetimeFigureOut">
               <a:rPr lang="en-US" smtClean="0"/>
-              <a:t>1/1/26</a:t>
+              <a:t>1/5/26</a:t>
             </a:fld>
             <a:endParaRPr lang="en-US"/>
           </a:p>
@@ -684,7 +684,7 @@
           <a:p>
             <a:fld id="{011B30B0-99F5-B94E-85D9-12C5A38C7F15}" type="datetimeFigureOut">
               <a:rPr lang="en-US" smtClean="0"/>
-              <a:t>1/1/26</a:t>
+              <a:t>1/5/26</a:t>
             </a:fld>
             <a:endParaRPr lang="en-US"/>
           </a:p>
@@ -854,7 +854,7 @@
           <a:p>
             <a:fld id="{011B30B0-99F5-B94E-85D9-12C5A38C7F15}" type="datetimeFigureOut">
               <a:rPr lang="en-US" smtClean="0"/>
-              <a:t>1/1/26</a:t>
+              <a:t>1/5/26</a:t>
             </a:fld>
             <a:endParaRPr lang="en-US"/>
           </a:p>
@@ -1034,7 +1034,7 @@
           <a:p>
             <a:fld id="{011B30B0-99F5-B94E-85D9-12C5A38C7F15}" type="datetimeFigureOut">
               <a:rPr lang="en-US" smtClean="0"/>
-              <a:t>1/1/26</a:t>
+              <a:t>1/5/26</a:t>
             </a:fld>
             <a:endParaRPr lang="en-US"/>
           </a:p>
@@ -1204,7 +1204,7 @@
           <a:p>
             <a:fld id="{011B30B0-99F5-B94E-85D9-12C5A38C7F15}" type="datetimeFigureOut">
               <a:rPr lang="en-US" smtClean="0"/>
-              <a:t>1/1/26</a:t>
+              <a:t>1/5/26</a:t>
             </a:fld>
             <a:endParaRPr lang="en-US"/>
           </a:p>
@@ -1450,7 +1450,7 @@
           <a:p>
             <a:fld id="{011B30B0-99F5-B94E-85D9-12C5A38C7F15}" type="datetimeFigureOut">
               <a:rPr lang="en-US" smtClean="0"/>
-              <a:t>1/1/26</a:t>
+              <a:t>1/5/26</a:t>
             </a:fld>
             <a:endParaRPr lang="en-US"/>
           </a:p>
@@ -1682,7 +1682,7 @@
           <a:p>
             <a:fld id="{011B30B0-99F5-B94E-85D9-12C5A38C7F15}" type="datetimeFigureOut">
               <a:rPr lang="en-US" smtClean="0"/>
-              <a:t>1/1/26</a:t>
+              <a:t>1/5/26</a:t>
             </a:fld>
             <a:endParaRPr lang="en-US"/>
           </a:p>
@@ -2049,7 +2049,7 @@
           <a:p>
             <a:fld id="{011B30B0-99F5-B94E-85D9-12C5A38C7F15}" type="datetimeFigureOut">
               <a:rPr lang="en-US" smtClean="0"/>
-              <a:t>1/1/26</a:t>
+              <a:t>1/5/26</a:t>
             </a:fld>
             <a:endParaRPr lang="en-US"/>
           </a:p>
@@ -2167,7 +2167,7 @@
           <a:p>
             <a:fld id="{011B30B0-99F5-B94E-85D9-12C5A38C7F15}" type="datetimeFigureOut">
               <a:rPr lang="en-US" smtClean="0"/>
-              <a:t>1/1/26</a:t>
+              <a:t>1/5/26</a:t>
             </a:fld>
             <a:endParaRPr lang="en-US"/>
           </a:p>
@@ -2262,7 +2262,7 @@
           <a:p>
             <a:fld id="{011B30B0-99F5-B94E-85D9-12C5A38C7F15}" type="datetimeFigureOut">
               <a:rPr lang="en-US" smtClean="0"/>
-              <a:t>1/1/26</a:t>
+              <a:t>1/5/26</a:t>
             </a:fld>
             <a:endParaRPr lang="en-US"/>
           </a:p>
@@ -2539,7 +2539,7 @@
           <a:p>
             <a:fld id="{011B30B0-99F5-B94E-85D9-12C5A38C7F15}" type="datetimeFigureOut">
               <a:rPr lang="en-US" smtClean="0"/>
-              <a:t>1/1/26</a:t>
+              <a:t>1/5/26</a:t>
             </a:fld>
             <a:endParaRPr lang="en-US"/>
           </a:p>
@@ -2796,7 +2796,7 @@
           <a:p>
             <a:fld id="{011B30B0-99F5-B94E-85D9-12C5A38C7F15}" type="datetimeFigureOut">
               <a:rPr lang="en-US" smtClean="0"/>
-              <a:t>1/1/26</a:t>
+              <a:t>1/5/26</a:t>
             </a:fld>
             <a:endParaRPr lang="en-US"/>
           </a:p>
@@ -3009,7 +3009,7 @@
           <a:p>
             <a:fld id="{011B30B0-99F5-B94E-85D9-12C5A38C7F15}" type="datetimeFigureOut">
               <a:rPr lang="en-US" smtClean="0"/>
-              <a:t>1/1/26</a:t>
+              <a:t>1/5/26</a:t>
             </a:fld>
             <a:endParaRPr lang="en-US"/>
           </a:p>
